--- a/ClassMaterial/Intelli J.pptx
+++ b/ClassMaterial/Intelli J.pptx
@@ -19,6 +19,7 @@
     <p:sldId id="267" r:id="rId13"/>
     <p:sldId id="268" r:id="rId14"/>
     <p:sldId id="269" r:id="rId15"/>
+    <p:sldId id="270" r:id="rId16"/>
   </p:sldIdLst>
   <p:sldSz cx="12192000" cy="6858000"/>
   <p:notesSz cx="6858000" cy="9144000"/>
@@ -256,7 +257,7 @@
           <a:p>
             <a:fld id="{807C33BB-4514-4907-A980-7D427D161620}" type="datetimeFigureOut">
               <a:rPr lang="ko-KR" altLang="en-US" smtClean="0"/>
-              <a:t>2026-03-05</a:t>
+              <a:t>2026-03-09</a:t>
             </a:fld>
             <a:endParaRPr lang="ko-KR" altLang="en-US"/>
           </a:p>
@@ -426,7 +427,7 @@
           <a:p>
             <a:fld id="{807C33BB-4514-4907-A980-7D427D161620}" type="datetimeFigureOut">
               <a:rPr lang="ko-KR" altLang="en-US" smtClean="0"/>
-              <a:t>2026-03-05</a:t>
+              <a:t>2026-03-09</a:t>
             </a:fld>
             <a:endParaRPr lang="ko-KR" altLang="en-US"/>
           </a:p>
@@ -606,7 +607,7 @@
           <a:p>
             <a:fld id="{807C33BB-4514-4907-A980-7D427D161620}" type="datetimeFigureOut">
               <a:rPr lang="ko-KR" altLang="en-US" smtClean="0"/>
-              <a:t>2026-03-05</a:t>
+              <a:t>2026-03-09</a:t>
             </a:fld>
             <a:endParaRPr lang="ko-KR" altLang="en-US"/>
           </a:p>
@@ -776,7 +777,7 @@
           <a:p>
             <a:fld id="{807C33BB-4514-4907-A980-7D427D161620}" type="datetimeFigureOut">
               <a:rPr lang="ko-KR" altLang="en-US" smtClean="0"/>
-              <a:t>2026-03-05</a:t>
+              <a:t>2026-03-09</a:t>
             </a:fld>
             <a:endParaRPr lang="ko-KR" altLang="en-US"/>
           </a:p>
@@ -1022,7 +1023,7 @@
           <a:p>
             <a:fld id="{807C33BB-4514-4907-A980-7D427D161620}" type="datetimeFigureOut">
               <a:rPr lang="ko-KR" altLang="en-US" smtClean="0"/>
-              <a:t>2026-03-05</a:t>
+              <a:t>2026-03-09</a:t>
             </a:fld>
             <a:endParaRPr lang="ko-KR" altLang="en-US"/>
           </a:p>
@@ -1254,7 +1255,7 @@
           <a:p>
             <a:fld id="{807C33BB-4514-4907-A980-7D427D161620}" type="datetimeFigureOut">
               <a:rPr lang="ko-KR" altLang="en-US" smtClean="0"/>
-              <a:t>2026-03-05</a:t>
+              <a:t>2026-03-09</a:t>
             </a:fld>
             <a:endParaRPr lang="ko-KR" altLang="en-US"/>
           </a:p>
@@ -1621,7 +1622,7 @@
           <a:p>
             <a:fld id="{807C33BB-4514-4907-A980-7D427D161620}" type="datetimeFigureOut">
               <a:rPr lang="ko-KR" altLang="en-US" smtClean="0"/>
-              <a:t>2026-03-05</a:t>
+              <a:t>2026-03-09</a:t>
             </a:fld>
             <a:endParaRPr lang="ko-KR" altLang="en-US"/>
           </a:p>
@@ -1739,7 +1740,7 @@
           <a:p>
             <a:fld id="{807C33BB-4514-4907-A980-7D427D161620}" type="datetimeFigureOut">
               <a:rPr lang="ko-KR" altLang="en-US" smtClean="0"/>
-              <a:t>2026-03-05</a:t>
+              <a:t>2026-03-09</a:t>
             </a:fld>
             <a:endParaRPr lang="ko-KR" altLang="en-US"/>
           </a:p>
@@ -1834,7 +1835,7 @@
           <a:p>
             <a:fld id="{807C33BB-4514-4907-A980-7D427D161620}" type="datetimeFigureOut">
               <a:rPr lang="ko-KR" altLang="en-US" smtClean="0"/>
-              <a:t>2026-03-05</a:t>
+              <a:t>2026-03-09</a:t>
             </a:fld>
             <a:endParaRPr lang="ko-KR" altLang="en-US"/>
           </a:p>
@@ -2111,7 +2112,7 @@
           <a:p>
             <a:fld id="{807C33BB-4514-4907-A980-7D427D161620}" type="datetimeFigureOut">
               <a:rPr lang="ko-KR" altLang="en-US" smtClean="0"/>
-              <a:t>2026-03-05</a:t>
+              <a:t>2026-03-09</a:t>
             </a:fld>
             <a:endParaRPr lang="ko-KR" altLang="en-US"/>
           </a:p>
@@ -2364,7 +2365,7 @@
           <a:p>
             <a:fld id="{807C33BB-4514-4907-A980-7D427D161620}" type="datetimeFigureOut">
               <a:rPr lang="ko-KR" altLang="en-US" smtClean="0"/>
-              <a:t>2026-03-05</a:t>
+              <a:t>2026-03-09</a:t>
             </a:fld>
             <a:endParaRPr lang="ko-KR" altLang="en-US"/>
           </a:p>
@@ -2577,7 +2578,7 @@
           <a:p>
             <a:fld id="{807C33BB-4514-4907-A980-7D427D161620}" type="datetimeFigureOut">
               <a:rPr lang="ko-KR" altLang="en-US" smtClean="0"/>
-              <a:t>2026-03-05</a:t>
+              <a:t>2026-03-09</a:t>
             </a:fld>
             <a:endParaRPr lang="ko-KR" altLang="en-US"/>
           </a:p>
@@ -4192,6 +4193,151 @@
 </p:sld>
 </file>
 
+<file path=ppt/slides/slide15.xml><?xml version="1.0" encoding="utf-8"?>
+<p:sld xmlns:a="http://schemas.openxmlformats.org/drawingml/2006/main" xmlns:r="http://schemas.openxmlformats.org/officeDocument/2006/relationships" xmlns:p="http://schemas.openxmlformats.org/presentationml/2006/main">
+  <p:cSld>
+    <p:spTree>
+      <p:nvGrpSpPr>
+        <p:cNvPr id="1" name=""/>
+        <p:cNvGrpSpPr/>
+        <p:nvPr/>
+      </p:nvGrpSpPr>
+      <p:grpSpPr>
+        <a:xfrm>
+          <a:off x="0" y="0"/>
+          <a:ext cx="0" cy="0"/>
+          <a:chOff x="0" y="0"/>
+          <a:chExt cx="0" cy="0"/>
+        </a:xfrm>
+      </p:grpSpPr>
+      <p:sp>
+        <p:nvSpPr>
+          <p:cNvPr id="8" name="TextBox 7"/>
+          <p:cNvSpPr txBox="1"/>
+          <p:nvPr/>
+        </p:nvSpPr>
+        <p:spPr>
+          <a:xfrm>
+            <a:off x="6655108" y="686383"/>
+            <a:ext cx="3163829" cy="646331"/>
+          </a:xfrm>
+          <a:prstGeom prst="rect">
+            <a:avLst/>
+          </a:prstGeom>
+          <a:noFill/>
+        </p:spPr>
+        <p:txBody>
+          <a:bodyPr wrap="square" rtlCol="0">
+            <a:spAutoFit/>
+          </a:bodyPr>
+          <a:lstStyle/>
+          <a:p>
+            <a:r>
+              <a:rPr lang="ko-KR" altLang="en-US" dirty="0" smtClean="0"/>
+              <a:t>프로젝트 진행 시 </a:t>
+            </a:r>
+            <a:endParaRPr lang="en-US" altLang="ko-KR" dirty="0" smtClean="0"/>
+          </a:p>
+          <a:p>
+            <a:r>
+              <a:rPr lang="en-US" altLang="ko-KR" dirty="0" smtClean="0"/>
+              <a:t>Dependencies List!!</a:t>
+            </a:r>
+            <a:endParaRPr lang="ko-KR" altLang="en-US" dirty="0"/>
+          </a:p>
+        </p:txBody>
+      </p:sp>
+      <p:pic>
+        <p:nvPicPr>
+          <p:cNvPr id="2" name="그림 1"/>
+          <p:cNvPicPr>
+            <a:picLocks noChangeAspect="1"/>
+          </p:cNvPicPr>
+          <p:nvPr/>
+        </p:nvPicPr>
+        <p:blipFill>
+          <a:blip r:embed="rId2"/>
+          <a:stretch>
+            <a:fillRect/>
+          </a:stretch>
+        </p:blipFill>
+        <p:spPr>
+          <a:xfrm>
+            <a:off x="0" y="0"/>
+            <a:ext cx="5596987" cy="5260595"/>
+          </a:xfrm>
+          <a:prstGeom prst="rect">
+            <a:avLst/>
+          </a:prstGeom>
+        </p:spPr>
+      </p:pic>
+      <p:sp>
+        <p:nvSpPr>
+          <p:cNvPr id="7" name="직사각형 6"/>
+          <p:cNvSpPr/>
+          <p:nvPr/>
+        </p:nvSpPr>
+        <p:spPr>
+          <a:xfrm>
+            <a:off x="2913717" y="2859577"/>
+            <a:ext cx="2683270" cy="1911928"/>
+          </a:xfrm>
+          <a:prstGeom prst="rect">
+            <a:avLst/>
+          </a:prstGeom>
+          <a:noFill/>
+          <a:ln w="28575">
+            <a:solidFill>
+              <a:srgbClr val="FF0000"/>
+            </a:solidFill>
+            <a:prstDash val="sysDash"/>
+          </a:ln>
+        </p:spPr>
+        <p:style>
+          <a:lnRef idx="2">
+            <a:schemeClr val="accent1">
+              <a:shade val="50000"/>
+            </a:schemeClr>
+          </a:lnRef>
+          <a:fillRef idx="1">
+            <a:schemeClr val="accent1"/>
+          </a:fillRef>
+          <a:effectRef idx="0">
+            <a:schemeClr val="accent1"/>
+          </a:effectRef>
+          <a:fontRef idx="minor">
+            <a:schemeClr val="lt1"/>
+          </a:fontRef>
+        </p:style>
+        <p:txBody>
+          <a:bodyPr rtlCol="0" anchor="ctr"/>
+          <a:lstStyle/>
+          <a:p>
+            <a:pPr algn="ctr"/>
+            <a:endParaRPr lang="ko-KR" altLang="en-US"/>
+          </a:p>
+        </p:txBody>
+      </p:sp>
+    </p:spTree>
+    <p:extLst>
+      <p:ext uri="{BB962C8B-B14F-4D97-AF65-F5344CB8AC3E}">
+        <p14:creationId xmlns:p14="http://schemas.microsoft.com/office/powerpoint/2010/main" val="582036838"/>
+      </p:ext>
+    </p:extLst>
+  </p:cSld>
+  <p:clrMapOvr>
+    <a:masterClrMapping/>
+  </p:clrMapOvr>
+  <p:timing>
+    <p:tnLst>
+      <p:par>
+        <p:cTn id="1" dur="indefinite" restart="never" nodeType="tmRoot"/>
+      </p:par>
+    </p:tnLst>
+  </p:timing>
+</p:sld>
+</file>
+
 <file path=ppt/slides/slide2.xml><?xml version="1.0" encoding="utf-8"?>
 <p:sld xmlns:a="http://schemas.openxmlformats.org/drawingml/2006/main" xmlns:r="http://schemas.openxmlformats.org/officeDocument/2006/relationships" xmlns:p="http://schemas.openxmlformats.org/presentationml/2006/main">
   <p:cSld>

--- a/ClassMaterial/Intelli J.pptx
+++ b/ClassMaterial/Intelli J.pptx
@@ -20,6 +20,11 @@
     <p:sldId id="268" r:id="rId14"/>
     <p:sldId id="269" r:id="rId15"/>
     <p:sldId id="270" r:id="rId16"/>
+    <p:sldId id="272" r:id="rId17"/>
+    <p:sldId id="273" r:id="rId18"/>
+    <p:sldId id="274" r:id="rId19"/>
+    <p:sldId id="275" r:id="rId20"/>
+    <p:sldId id="271" r:id="rId21"/>
   </p:sldIdLst>
   <p:sldSz cx="12192000" cy="6858000"/>
   <p:notesSz cx="6858000" cy="9144000"/>
@@ -119,6 +124,54 @@
     </a:lvl9pPr>
   </p:defaultTextStyle>
   <p:extLst>
+    <p:ext uri="{521415D9-36F7-43E2-AB2F-B90AF26B5E84}">
+      <p14:sectionLst xmlns:p14="http://schemas.microsoft.com/office/powerpoint/2010/main">
+        <p14:section name="설치" id="{CCEA5901-2850-4BC8-AF8A-637291B53D92}">
+          <p14:sldIdLst>
+            <p14:sldId id="256"/>
+            <p14:sldId id="257"/>
+            <p14:sldId id="258"/>
+            <p14:sldId id="259"/>
+          </p14:sldIdLst>
+        </p14:section>
+        <p14:section name="JDK 17 설치" id="{6A375973-20F8-46AF-A071-60021E930646}">
+          <p14:sldIdLst>
+            <p14:sldId id="260"/>
+            <p14:sldId id="261"/>
+          </p14:sldIdLst>
+        </p14:section>
+        <p14:section name="DB" id="{9793C09C-662B-47C7-85DF-AA44FE790B09}">
+          <p14:sldIdLst>
+            <p14:sldId id="262"/>
+            <p14:sldId id="263"/>
+          </p14:sldIdLst>
+        </p14:section>
+        <p14:section name="Maven Repo" id="{8527B785-CF49-426D-A4D0-0FAFD998B4E3}">
+          <p14:sldIdLst>
+            <p14:sldId id="264"/>
+            <p14:sldId id="265"/>
+            <p14:sldId id="266"/>
+            <p14:sldId id="267"/>
+          </p14:sldIdLst>
+        </p14:section>
+        <p14:section name="Tailwind" id="{AFEC82FD-886C-4952-88F6-108A963B08B1}">
+          <p14:sldIdLst>
+            <p14:sldId id="268"/>
+            <p14:sldId id="269"/>
+            <p14:sldId id="270"/>
+          </p14:sldIdLst>
+        </p14:section>
+        <p14:section name="JPA" id="{95EBC2E4-220B-4798-80EF-E60B74837A55}">
+          <p14:sldIdLst>
+            <p14:sldId id="272"/>
+            <p14:sldId id="273"/>
+            <p14:sldId id="274"/>
+            <p14:sldId id="275"/>
+            <p14:sldId id="271"/>
+          </p14:sldIdLst>
+        </p14:section>
+      </p14:sectionLst>
+    </p:ext>
     <p:ext uri="{EFAFB233-063F-42B5-8137-9DF3F51BA10A}">
       <p15:sldGuideLst xmlns:p15="http://schemas.microsoft.com/office/powerpoint/2012/main"/>
     </p:ext>
@@ -257,7 +310,7 @@
           <a:p>
             <a:fld id="{807C33BB-4514-4907-A980-7D427D161620}" type="datetimeFigureOut">
               <a:rPr lang="ko-KR" altLang="en-US" smtClean="0"/>
-              <a:t>2026-03-09</a:t>
+              <a:t>2026-03-11</a:t>
             </a:fld>
             <a:endParaRPr lang="ko-KR" altLang="en-US"/>
           </a:p>
@@ -427,7 +480,7 @@
           <a:p>
             <a:fld id="{807C33BB-4514-4907-A980-7D427D161620}" type="datetimeFigureOut">
               <a:rPr lang="ko-KR" altLang="en-US" smtClean="0"/>
-              <a:t>2026-03-09</a:t>
+              <a:t>2026-03-11</a:t>
             </a:fld>
             <a:endParaRPr lang="ko-KR" altLang="en-US"/>
           </a:p>
@@ -607,7 +660,7 @@
           <a:p>
             <a:fld id="{807C33BB-4514-4907-A980-7D427D161620}" type="datetimeFigureOut">
               <a:rPr lang="ko-KR" altLang="en-US" smtClean="0"/>
-              <a:t>2026-03-09</a:t>
+              <a:t>2026-03-11</a:t>
             </a:fld>
             <a:endParaRPr lang="ko-KR" altLang="en-US"/>
           </a:p>
@@ -777,7 +830,7 @@
           <a:p>
             <a:fld id="{807C33BB-4514-4907-A980-7D427D161620}" type="datetimeFigureOut">
               <a:rPr lang="ko-KR" altLang="en-US" smtClean="0"/>
-              <a:t>2026-03-09</a:t>
+              <a:t>2026-03-11</a:t>
             </a:fld>
             <a:endParaRPr lang="ko-KR" altLang="en-US"/>
           </a:p>
@@ -1023,7 +1076,7 @@
           <a:p>
             <a:fld id="{807C33BB-4514-4907-A980-7D427D161620}" type="datetimeFigureOut">
               <a:rPr lang="ko-KR" altLang="en-US" smtClean="0"/>
-              <a:t>2026-03-09</a:t>
+              <a:t>2026-03-11</a:t>
             </a:fld>
             <a:endParaRPr lang="ko-KR" altLang="en-US"/>
           </a:p>
@@ -1255,7 +1308,7 @@
           <a:p>
             <a:fld id="{807C33BB-4514-4907-A980-7D427D161620}" type="datetimeFigureOut">
               <a:rPr lang="ko-KR" altLang="en-US" smtClean="0"/>
-              <a:t>2026-03-09</a:t>
+              <a:t>2026-03-11</a:t>
             </a:fld>
             <a:endParaRPr lang="ko-KR" altLang="en-US"/>
           </a:p>
@@ -1622,7 +1675,7 @@
           <a:p>
             <a:fld id="{807C33BB-4514-4907-A980-7D427D161620}" type="datetimeFigureOut">
               <a:rPr lang="ko-KR" altLang="en-US" smtClean="0"/>
-              <a:t>2026-03-09</a:t>
+              <a:t>2026-03-11</a:t>
             </a:fld>
             <a:endParaRPr lang="ko-KR" altLang="en-US"/>
           </a:p>
@@ -1740,7 +1793,7 @@
           <a:p>
             <a:fld id="{807C33BB-4514-4907-A980-7D427D161620}" type="datetimeFigureOut">
               <a:rPr lang="ko-KR" altLang="en-US" smtClean="0"/>
-              <a:t>2026-03-09</a:t>
+              <a:t>2026-03-11</a:t>
             </a:fld>
             <a:endParaRPr lang="ko-KR" altLang="en-US"/>
           </a:p>
@@ -1835,7 +1888,7 @@
           <a:p>
             <a:fld id="{807C33BB-4514-4907-A980-7D427D161620}" type="datetimeFigureOut">
               <a:rPr lang="ko-KR" altLang="en-US" smtClean="0"/>
-              <a:t>2026-03-09</a:t>
+              <a:t>2026-03-11</a:t>
             </a:fld>
             <a:endParaRPr lang="ko-KR" altLang="en-US"/>
           </a:p>
@@ -2112,7 +2165,7 @@
           <a:p>
             <a:fld id="{807C33BB-4514-4907-A980-7D427D161620}" type="datetimeFigureOut">
               <a:rPr lang="ko-KR" altLang="en-US" smtClean="0"/>
-              <a:t>2026-03-09</a:t>
+              <a:t>2026-03-11</a:t>
             </a:fld>
             <a:endParaRPr lang="ko-KR" altLang="en-US"/>
           </a:p>
@@ -2365,7 +2418,7 @@
           <a:p>
             <a:fld id="{807C33BB-4514-4907-A980-7D427D161620}" type="datetimeFigureOut">
               <a:rPr lang="ko-KR" altLang="en-US" smtClean="0"/>
-              <a:t>2026-03-09</a:t>
+              <a:t>2026-03-11</a:t>
             </a:fld>
             <a:endParaRPr lang="ko-KR" altLang="en-US"/>
           </a:p>
@@ -2578,7 +2631,7 @@
           <a:p>
             <a:fld id="{807C33BB-4514-4907-A980-7D427D161620}" type="datetimeFigureOut">
               <a:rPr lang="ko-KR" altLang="en-US" smtClean="0"/>
-              <a:t>2026-03-09</a:t>
+              <a:t>2026-03-11</a:t>
             </a:fld>
             <a:endParaRPr lang="ko-KR" altLang="en-US"/>
           </a:p>
@@ -4338,6 +4391,579 @@
 </p:sld>
 </file>
 
+<file path=ppt/slides/slide16.xml><?xml version="1.0" encoding="utf-8"?>
+<p:sld xmlns:a="http://schemas.openxmlformats.org/drawingml/2006/main" xmlns:r="http://schemas.openxmlformats.org/officeDocument/2006/relationships" xmlns:p="http://schemas.openxmlformats.org/presentationml/2006/main">
+  <p:cSld>
+    <p:spTree>
+      <p:nvGrpSpPr>
+        <p:cNvPr id="1" name=""/>
+        <p:cNvGrpSpPr/>
+        <p:nvPr/>
+      </p:nvGrpSpPr>
+      <p:grpSpPr>
+        <a:xfrm>
+          <a:off x="0" y="0"/>
+          <a:ext cx="0" cy="0"/>
+          <a:chOff x="0" y="0"/>
+          <a:chExt cx="0" cy="0"/>
+        </a:xfrm>
+      </p:grpSpPr>
+      <p:pic>
+        <p:nvPicPr>
+          <p:cNvPr id="4" name="그림 3"/>
+          <p:cNvPicPr>
+            <a:picLocks noChangeAspect="1"/>
+          </p:cNvPicPr>
+          <p:nvPr/>
+        </p:nvPicPr>
+        <p:blipFill>
+          <a:blip r:embed="rId2"/>
+          <a:stretch>
+            <a:fillRect/>
+          </a:stretch>
+        </p:blipFill>
+        <p:spPr>
+          <a:xfrm>
+            <a:off x="0" y="0"/>
+            <a:ext cx="9864023" cy="4372442"/>
+          </a:xfrm>
+          <a:prstGeom prst="rect">
+            <a:avLst/>
+          </a:prstGeom>
+        </p:spPr>
+      </p:pic>
+      <p:sp>
+        <p:nvSpPr>
+          <p:cNvPr id="5" name="직사각형 4"/>
+          <p:cNvSpPr/>
+          <p:nvPr/>
+        </p:nvSpPr>
+        <p:spPr>
+          <a:xfrm>
+            <a:off x="687904" y="1668458"/>
+            <a:ext cx="1159366" cy="185368"/>
+          </a:xfrm>
+          <a:prstGeom prst="rect">
+            <a:avLst/>
+          </a:prstGeom>
+          <a:noFill/>
+          <a:ln w="28575">
+            <a:solidFill>
+              <a:srgbClr val="FF0000"/>
+            </a:solidFill>
+            <a:prstDash val="sysDash"/>
+          </a:ln>
+        </p:spPr>
+        <p:style>
+          <a:lnRef idx="2">
+            <a:schemeClr val="accent1">
+              <a:shade val="50000"/>
+            </a:schemeClr>
+          </a:lnRef>
+          <a:fillRef idx="1">
+            <a:schemeClr val="accent1"/>
+          </a:fillRef>
+          <a:effectRef idx="0">
+            <a:schemeClr val="accent1"/>
+          </a:effectRef>
+          <a:fontRef idx="minor">
+            <a:schemeClr val="lt1"/>
+          </a:fontRef>
+        </p:style>
+        <p:txBody>
+          <a:bodyPr rtlCol="0" anchor="ctr"/>
+          <a:lstStyle/>
+          <a:p>
+            <a:pPr algn="ctr"/>
+            <a:endParaRPr lang="ko-KR" altLang="en-US"/>
+          </a:p>
+        </p:txBody>
+      </p:sp>
+    </p:spTree>
+    <p:extLst>
+      <p:ext uri="{BB962C8B-B14F-4D97-AF65-F5344CB8AC3E}">
+        <p14:creationId xmlns:p14="http://schemas.microsoft.com/office/powerpoint/2010/main" val="3768185922"/>
+      </p:ext>
+    </p:extLst>
+  </p:cSld>
+  <p:clrMapOvr>
+    <a:masterClrMapping/>
+  </p:clrMapOvr>
+  <p:timing>
+    <p:tnLst>
+      <p:par>
+        <p:cTn id="1" dur="indefinite" restart="never" nodeType="tmRoot"/>
+      </p:par>
+    </p:tnLst>
+  </p:timing>
+</p:sld>
+</file>
+
+<file path=ppt/slides/slide17.xml><?xml version="1.0" encoding="utf-8"?>
+<p:sld xmlns:a="http://schemas.openxmlformats.org/drawingml/2006/main" xmlns:r="http://schemas.openxmlformats.org/officeDocument/2006/relationships" xmlns:p="http://schemas.openxmlformats.org/presentationml/2006/main">
+  <p:cSld>
+    <p:spTree>
+      <p:nvGrpSpPr>
+        <p:cNvPr id="1" name=""/>
+        <p:cNvGrpSpPr/>
+        <p:nvPr/>
+      </p:nvGrpSpPr>
+      <p:grpSpPr>
+        <a:xfrm>
+          <a:off x="0" y="0"/>
+          <a:ext cx="0" cy="0"/>
+          <a:chOff x="0" y="0"/>
+          <a:chExt cx="0" cy="0"/>
+        </a:xfrm>
+      </p:grpSpPr>
+      <p:pic>
+        <p:nvPicPr>
+          <p:cNvPr id="2" name="그림 1"/>
+          <p:cNvPicPr>
+            <a:picLocks noChangeAspect="1"/>
+          </p:cNvPicPr>
+          <p:nvPr/>
+        </p:nvPicPr>
+        <p:blipFill>
+          <a:blip r:embed="rId2"/>
+          <a:stretch>
+            <a:fillRect/>
+          </a:stretch>
+        </p:blipFill>
+        <p:spPr>
+          <a:xfrm>
+            <a:off x="0" y="0"/>
+            <a:ext cx="9785943" cy="6441545"/>
+          </a:xfrm>
+          <a:prstGeom prst="rect">
+            <a:avLst/>
+          </a:prstGeom>
+        </p:spPr>
+      </p:pic>
+      <p:sp>
+        <p:nvSpPr>
+          <p:cNvPr id="3" name="직사각형 2"/>
+          <p:cNvSpPr/>
+          <p:nvPr/>
+        </p:nvSpPr>
+        <p:spPr>
+          <a:xfrm>
+            <a:off x="677901" y="4630803"/>
+            <a:ext cx="278832" cy="271397"/>
+          </a:xfrm>
+          <a:prstGeom prst="rect">
+            <a:avLst/>
+          </a:prstGeom>
+          <a:noFill/>
+          <a:ln w="28575">
+            <a:solidFill>
+              <a:srgbClr val="FF0000"/>
+            </a:solidFill>
+            <a:prstDash val="sysDash"/>
+          </a:ln>
+        </p:spPr>
+        <p:style>
+          <a:lnRef idx="2">
+            <a:schemeClr val="accent1">
+              <a:shade val="50000"/>
+            </a:schemeClr>
+          </a:lnRef>
+          <a:fillRef idx="1">
+            <a:schemeClr val="accent1"/>
+          </a:fillRef>
+          <a:effectRef idx="0">
+            <a:schemeClr val="accent1"/>
+          </a:effectRef>
+          <a:fontRef idx="minor">
+            <a:schemeClr val="lt1"/>
+          </a:fontRef>
+        </p:style>
+        <p:txBody>
+          <a:bodyPr rtlCol="0" anchor="ctr"/>
+          <a:lstStyle/>
+          <a:p>
+            <a:pPr algn="ctr"/>
+            <a:endParaRPr lang="ko-KR" altLang="en-US"/>
+          </a:p>
+        </p:txBody>
+      </p:sp>
+    </p:spTree>
+    <p:extLst>
+      <p:ext uri="{BB962C8B-B14F-4D97-AF65-F5344CB8AC3E}">
+        <p14:creationId xmlns:p14="http://schemas.microsoft.com/office/powerpoint/2010/main" val="1104207816"/>
+      </p:ext>
+    </p:extLst>
+  </p:cSld>
+  <p:clrMapOvr>
+    <a:masterClrMapping/>
+  </p:clrMapOvr>
+  <p:timing>
+    <p:tnLst>
+      <p:par>
+        <p:cTn id="1" dur="indefinite" restart="never" nodeType="tmRoot"/>
+      </p:par>
+    </p:tnLst>
+  </p:timing>
+</p:sld>
+</file>
+
+<file path=ppt/slides/slide18.xml><?xml version="1.0" encoding="utf-8"?>
+<p:sld xmlns:a="http://schemas.openxmlformats.org/drawingml/2006/main" xmlns:r="http://schemas.openxmlformats.org/officeDocument/2006/relationships" xmlns:p="http://schemas.openxmlformats.org/presentationml/2006/main">
+  <p:cSld>
+    <p:spTree>
+      <p:nvGrpSpPr>
+        <p:cNvPr id="1" name=""/>
+        <p:cNvGrpSpPr/>
+        <p:nvPr/>
+      </p:nvGrpSpPr>
+      <p:grpSpPr>
+        <a:xfrm>
+          <a:off x="0" y="0"/>
+          <a:ext cx="0" cy="0"/>
+          <a:chOff x="0" y="0"/>
+          <a:chExt cx="0" cy="0"/>
+        </a:xfrm>
+      </p:grpSpPr>
+      <p:pic>
+        <p:nvPicPr>
+          <p:cNvPr id="2" name="그림 1"/>
+          <p:cNvPicPr>
+            <a:picLocks noChangeAspect="1"/>
+          </p:cNvPicPr>
+          <p:nvPr/>
+        </p:nvPicPr>
+        <p:blipFill>
+          <a:blip r:embed="rId2"/>
+          <a:stretch>
+            <a:fillRect/>
+          </a:stretch>
+        </p:blipFill>
+        <p:spPr>
+          <a:xfrm>
+            <a:off x="0" y="0"/>
+            <a:ext cx="9883542" cy="6402505"/>
+          </a:xfrm>
+          <a:prstGeom prst="rect">
+            <a:avLst/>
+          </a:prstGeom>
+        </p:spPr>
+      </p:pic>
+      <p:sp>
+        <p:nvSpPr>
+          <p:cNvPr id="3" name="직사각형 2"/>
+          <p:cNvSpPr/>
+          <p:nvPr/>
+        </p:nvSpPr>
+        <p:spPr>
+          <a:xfrm>
+            <a:off x="762567" y="4732403"/>
+            <a:ext cx="278832" cy="271397"/>
+          </a:xfrm>
+          <a:prstGeom prst="rect">
+            <a:avLst/>
+          </a:prstGeom>
+          <a:noFill/>
+          <a:ln w="28575">
+            <a:solidFill>
+              <a:srgbClr val="FF0000"/>
+            </a:solidFill>
+            <a:prstDash val="sysDash"/>
+          </a:ln>
+        </p:spPr>
+        <p:style>
+          <a:lnRef idx="2">
+            <a:schemeClr val="accent1">
+              <a:shade val="50000"/>
+            </a:schemeClr>
+          </a:lnRef>
+          <a:fillRef idx="1">
+            <a:schemeClr val="accent1"/>
+          </a:fillRef>
+          <a:effectRef idx="0">
+            <a:schemeClr val="accent1"/>
+          </a:effectRef>
+          <a:fontRef idx="minor">
+            <a:schemeClr val="lt1"/>
+          </a:fontRef>
+        </p:style>
+        <p:txBody>
+          <a:bodyPr rtlCol="0" anchor="ctr"/>
+          <a:lstStyle/>
+          <a:p>
+            <a:pPr algn="ctr"/>
+            <a:endParaRPr lang="ko-KR" altLang="en-US"/>
+          </a:p>
+        </p:txBody>
+      </p:sp>
+      <p:sp>
+        <p:nvSpPr>
+          <p:cNvPr id="4" name="직사각형 3"/>
+          <p:cNvSpPr/>
+          <p:nvPr/>
+        </p:nvSpPr>
+        <p:spPr>
+          <a:xfrm>
+            <a:off x="483734" y="5231936"/>
+            <a:ext cx="2615065" cy="322197"/>
+          </a:xfrm>
+          <a:prstGeom prst="rect">
+            <a:avLst/>
+          </a:prstGeom>
+          <a:noFill/>
+          <a:ln w="28575">
+            <a:solidFill>
+              <a:srgbClr val="FF0000"/>
+            </a:solidFill>
+            <a:prstDash val="sysDash"/>
+          </a:ln>
+        </p:spPr>
+        <p:style>
+          <a:lnRef idx="2">
+            <a:schemeClr val="accent1">
+              <a:shade val="50000"/>
+            </a:schemeClr>
+          </a:lnRef>
+          <a:fillRef idx="1">
+            <a:schemeClr val="accent1"/>
+          </a:fillRef>
+          <a:effectRef idx="0">
+            <a:schemeClr val="accent1"/>
+          </a:effectRef>
+          <a:fontRef idx="minor">
+            <a:schemeClr val="lt1"/>
+          </a:fontRef>
+        </p:style>
+        <p:txBody>
+          <a:bodyPr rtlCol="0" anchor="ctr"/>
+          <a:lstStyle/>
+          <a:p>
+            <a:pPr algn="ctr"/>
+            <a:endParaRPr lang="ko-KR" altLang="en-US"/>
+          </a:p>
+        </p:txBody>
+      </p:sp>
+    </p:spTree>
+    <p:extLst>
+      <p:ext uri="{BB962C8B-B14F-4D97-AF65-F5344CB8AC3E}">
+        <p14:creationId xmlns:p14="http://schemas.microsoft.com/office/powerpoint/2010/main" val="1756672571"/>
+      </p:ext>
+    </p:extLst>
+  </p:cSld>
+  <p:clrMapOvr>
+    <a:masterClrMapping/>
+  </p:clrMapOvr>
+  <p:timing>
+    <p:tnLst>
+      <p:par>
+        <p:cTn id="1" dur="indefinite" restart="never" nodeType="tmRoot"/>
+      </p:par>
+    </p:tnLst>
+  </p:timing>
+</p:sld>
+</file>
+
+<file path=ppt/slides/slide19.xml><?xml version="1.0" encoding="utf-8"?>
+<p:sld xmlns:a="http://schemas.openxmlformats.org/drawingml/2006/main" xmlns:r="http://schemas.openxmlformats.org/officeDocument/2006/relationships" xmlns:p="http://schemas.openxmlformats.org/presentationml/2006/main">
+  <p:cSld>
+    <p:spTree>
+      <p:nvGrpSpPr>
+        <p:cNvPr id="1" name=""/>
+        <p:cNvGrpSpPr/>
+        <p:nvPr/>
+      </p:nvGrpSpPr>
+      <p:grpSpPr>
+        <a:xfrm>
+          <a:off x="0" y="0"/>
+          <a:ext cx="0" cy="0"/>
+          <a:chOff x="0" y="0"/>
+          <a:chExt cx="0" cy="0"/>
+        </a:xfrm>
+      </p:grpSpPr>
+      <p:pic>
+        <p:nvPicPr>
+          <p:cNvPr id="2" name="그림 1"/>
+          <p:cNvPicPr>
+            <a:picLocks noChangeAspect="1"/>
+          </p:cNvPicPr>
+          <p:nvPr/>
+        </p:nvPicPr>
+        <p:blipFill>
+          <a:blip r:embed="rId2"/>
+          <a:stretch>
+            <a:fillRect/>
+          </a:stretch>
+        </p:blipFill>
+        <p:spPr>
+          <a:xfrm>
+            <a:off x="0" y="0"/>
+            <a:ext cx="10612283" cy="4918997"/>
+          </a:xfrm>
+          <a:prstGeom prst="rect">
+            <a:avLst/>
+          </a:prstGeom>
+        </p:spPr>
+      </p:pic>
+      <p:sp>
+        <p:nvSpPr>
+          <p:cNvPr id="3" name="직사각형 2"/>
+          <p:cNvSpPr/>
+          <p:nvPr/>
+        </p:nvSpPr>
+        <p:spPr>
+          <a:xfrm>
+            <a:off x="211667" y="3326935"/>
+            <a:ext cx="618066" cy="118997"/>
+          </a:xfrm>
+          <a:prstGeom prst="rect">
+            <a:avLst/>
+          </a:prstGeom>
+          <a:noFill/>
+          <a:ln w="28575">
+            <a:solidFill>
+              <a:srgbClr val="FF0000"/>
+            </a:solidFill>
+            <a:prstDash val="sysDash"/>
+          </a:ln>
+        </p:spPr>
+        <p:style>
+          <a:lnRef idx="2">
+            <a:schemeClr val="accent1">
+              <a:shade val="50000"/>
+            </a:schemeClr>
+          </a:lnRef>
+          <a:fillRef idx="1">
+            <a:schemeClr val="accent1"/>
+          </a:fillRef>
+          <a:effectRef idx="0">
+            <a:schemeClr val="accent1"/>
+          </a:effectRef>
+          <a:fontRef idx="minor">
+            <a:schemeClr val="lt1"/>
+          </a:fontRef>
+        </p:style>
+        <p:txBody>
+          <a:bodyPr rtlCol="0" anchor="ctr"/>
+          <a:lstStyle/>
+          <a:p>
+            <a:pPr algn="ctr"/>
+            <a:endParaRPr lang="ko-KR" altLang="en-US"/>
+          </a:p>
+        </p:txBody>
+      </p:sp>
+      <p:sp>
+        <p:nvSpPr>
+          <p:cNvPr id="4" name="직사각형 3"/>
+          <p:cNvSpPr/>
+          <p:nvPr/>
+        </p:nvSpPr>
+        <p:spPr>
+          <a:xfrm>
+            <a:off x="2430501" y="3241804"/>
+            <a:ext cx="6349432" cy="491995"/>
+          </a:xfrm>
+          <a:prstGeom prst="rect">
+            <a:avLst/>
+          </a:prstGeom>
+          <a:noFill/>
+          <a:ln w="28575">
+            <a:solidFill>
+              <a:srgbClr val="FF0000"/>
+            </a:solidFill>
+            <a:prstDash val="sysDash"/>
+          </a:ln>
+        </p:spPr>
+        <p:style>
+          <a:lnRef idx="2">
+            <a:schemeClr val="accent1">
+              <a:shade val="50000"/>
+            </a:schemeClr>
+          </a:lnRef>
+          <a:fillRef idx="1">
+            <a:schemeClr val="accent1"/>
+          </a:fillRef>
+          <a:effectRef idx="0">
+            <a:schemeClr val="accent1"/>
+          </a:effectRef>
+          <a:fontRef idx="minor">
+            <a:schemeClr val="lt1"/>
+          </a:fontRef>
+        </p:style>
+        <p:txBody>
+          <a:bodyPr rtlCol="0" anchor="ctr"/>
+          <a:lstStyle/>
+          <a:p>
+            <a:pPr algn="ctr"/>
+            <a:endParaRPr lang="ko-KR" altLang="en-US"/>
+          </a:p>
+        </p:txBody>
+      </p:sp>
+      <p:sp>
+        <p:nvSpPr>
+          <p:cNvPr id="5" name="직사각형 4"/>
+          <p:cNvSpPr/>
+          <p:nvPr/>
+        </p:nvSpPr>
+        <p:spPr>
+          <a:xfrm>
+            <a:off x="9808633" y="592202"/>
+            <a:ext cx="423333" cy="212130"/>
+          </a:xfrm>
+          <a:prstGeom prst="rect">
+            <a:avLst/>
+          </a:prstGeom>
+          <a:noFill/>
+          <a:ln w="28575">
+            <a:solidFill>
+              <a:srgbClr val="FF0000"/>
+            </a:solidFill>
+            <a:prstDash val="sysDash"/>
+          </a:ln>
+        </p:spPr>
+        <p:style>
+          <a:lnRef idx="2">
+            <a:schemeClr val="accent1">
+              <a:shade val="50000"/>
+            </a:schemeClr>
+          </a:lnRef>
+          <a:fillRef idx="1">
+            <a:schemeClr val="accent1"/>
+          </a:fillRef>
+          <a:effectRef idx="0">
+            <a:schemeClr val="accent1"/>
+          </a:effectRef>
+          <a:fontRef idx="minor">
+            <a:schemeClr val="lt1"/>
+          </a:fontRef>
+        </p:style>
+        <p:txBody>
+          <a:bodyPr rtlCol="0" anchor="ctr"/>
+          <a:lstStyle/>
+          <a:p>
+            <a:pPr algn="ctr"/>
+            <a:endParaRPr lang="ko-KR" altLang="en-US"/>
+          </a:p>
+        </p:txBody>
+      </p:sp>
+    </p:spTree>
+    <p:extLst>
+      <p:ext uri="{BB962C8B-B14F-4D97-AF65-F5344CB8AC3E}">
+        <p14:creationId xmlns:p14="http://schemas.microsoft.com/office/powerpoint/2010/main" val="434070874"/>
+      </p:ext>
+    </p:extLst>
+  </p:cSld>
+  <p:clrMapOvr>
+    <a:masterClrMapping/>
+  </p:clrMapOvr>
+  <p:timing>
+    <p:tnLst>
+      <p:par>
+        <p:cTn id="1" dur="indefinite" restart="never" nodeType="tmRoot"/>
+      </p:par>
+    </p:tnLst>
+  </p:timing>
+</p:sld>
+</file>
+
 <file path=ppt/slides/slide2.xml><?xml version="1.0" encoding="utf-8"?>
 <p:sld xmlns:a="http://schemas.openxmlformats.org/drawingml/2006/main" xmlns:r="http://schemas.openxmlformats.org/officeDocument/2006/relationships" xmlns:p="http://schemas.openxmlformats.org/presentationml/2006/main">
   <p:cSld>
@@ -4454,6 +5080,127 @@
     <p:extLst>
       <p:ext uri="{BB962C8B-B14F-4D97-AF65-F5344CB8AC3E}">
         <p14:creationId xmlns:p14="http://schemas.microsoft.com/office/powerpoint/2010/main" val="3961433270"/>
+      </p:ext>
+    </p:extLst>
+  </p:cSld>
+  <p:clrMapOvr>
+    <a:masterClrMapping/>
+  </p:clrMapOvr>
+  <p:timing>
+    <p:tnLst>
+      <p:par>
+        <p:cTn id="1" dur="indefinite" restart="never" nodeType="tmRoot"/>
+      </p:par>
+    </p:tnLst>
+  </p:timing>
+</p:sld>
+</file>
+
+<file path=ppt/slides/slide20.xml><?xml version="1.0" encoding="utf-8"?>
+<p:sld xmlns:a="http://schemas.openxmlformats.org/drawingml/2006/main" xmlns:r="http://schemas.openxmlformats.org/officeDocument/2006/relationships" xmlns:p="http://schemas.openxmlformats.org/presentationml/2006/main">
+  <p:cSld>
+    <p:spTree>
+      <p:nvGrpSpPr>
+        <p:cNvPr id="1" name=""/>
+        <p:cNvGrpSpPr/>
+        <p:nvPr/>
+      </p:nvGrpSpPr>
+      <p:grpSpPr>
+        <a:xfrm>
+          <a:off x="0" y="0"/>
+          <a:ext cx="0" cy="0"/>
+          <a:chOff x="0" y="0"/>
+          <a:chExt cx="0" cy="0"/>
+        </a:xfrm>
+      </p:grpSpPr>
+      <p:sp>
+        <p:nvSpPr>
+          <p:cNvPr id="8" name="TextBox 7"/>
+          <p:cNvSpPr txBox="1"/>
+          <p:nvPr/>
+        </p:nvSpPr>
+        <p:spPr>
+          <a:xfrm>
+            <a:off x="6655108" y="686383"/>
+            <a:ext cx="3163829" cy="646331"/>
+          </a:xfrm>
+          <a:prstGeom prst="rect">
+            <a:avLst/>
+          </a:prstGeom>
+          <a:noFill/>
+        </p:spPr>
+        <p:txBody>
+          <a:bodyPr wrap="square" rtlCol="0">
+            <a:spAutoFit/>
+          </a:bodyPr>
+          <a:lstStyle/>
+          <a:p>
+            <a:r>
+              <a:rPr lang="ko-KR" altLang="en-US" dirty="0" smtClean="0"/>
+              <a:t>프로젝트 진행 시 </a:t>
+            </a:r>
+            <a:endParaRPr lang="en-US" altLang="ko-KR" dirty="0" smtClean="0"/>
+          </a:p>
+          <a:p>
+            <a:r>
+              <a:rPr lang="en-US" altLang="ko-KR" dirty="0" smtClean="0"/>
+              <a:t>Dependencies List!!</a:t>
+            </a:r>
+            <a:endParaRPr lang="ko-KR" altLang="en-US" dirty="0"/>
+          </a:p>
+        </p:txBody>
+      </p:sp>
+      <p:sp>
+        <p:nvSpPr>
+          <p:cNvPr id="7" name="직사각형 6"/>
+          <p:cNvSpPr/>
+          <p:nvPr/>
+        </p:nvSpPr>
+        <p:spPr>
+          <a:xfrm>
+            <a:off x="2913717" y="2859577"/>
+            <a:ext cx="2683270" cy="1911928"/>
+          </a:xfrm>
+          <a:prstGeom prst="rect">
+            <a:avLst/>
+          </a:prstGeom>
+          <a:noFill/>
+          <a:ln w="28575">
+            <a:solidFill>
+              <a:srgbClr val="FF0000"/>
+            </a:solidFill>
+            <a:prstDash val="sysDash"/>
+          </a:ln>
+        </p:spPr>
+        <p:style>
+          <a:lnRef idx="2">
+            <a:schemeClr val="accent1">
+              <a:shade val="50000"/>
+            </a:schemeClr>
+          </a:lnRef>
+          <a:fillRef idx="1">
+            <a:schemeClr val="accent1"/>
+          </a:fillRef>
+          <a:effectRef idx="0">
+            <a:schemeClr val="accent1"/>
+          </a:effectRef>
+          <a:fontRef idx="minor">
+            <a:schemeClr val="lt1"/>
+          </a:fontRef>
+        </p:style>
+        <p:txBody>
+          <a:bodyPr rtlCol="0" anchor="ctr"/>
+          <a:lstStyle/>
+          <a:p>
+            <a:pPr algn="ctr"/>
+            <a:endParaRPr lang="ko-KR" altLang="en-US"/>
+          </a:p>
+        </p:txBody>
+      </p:sp>
+    </p:spTree>
+    <p:extLst>
+      <p:ext uri="{BB962C8B-B14F-4D97-AF65-F5344CB8AC3E}">
+        <p14:creationId xmlns:p14="http://schemas.microsoft.com/office/powerpoint/2010/main" val="3030026438"/>
       </p:ext>
     </p:extLst>
   </p:cSld>
